--- a/materials/slides/session-1.pptx
+++ b/materials/slides/session-1.pptx
@@ -5769,7 +5769,7 @@
                 </a:solidFill>
                 <a:latin typeface="Courier New"/>
               </a:rPr>
-              <a:t>git clone https://github.com/OWNER/GROUP.git</a:t>
+              <a:t>git clone git@github.com:OWNER/GROUP.git</a:t>
             </a:r>
           </a:p>
         </p:txBody>

--- a/materials/slides/session-1.pptx
+++ b/materials/slides/session-1.pptx
@@ -6856,7 +6856,7 @@
                 </a:solidFill>
                 <a:latin typeface="Arial"/>
               </a:rPr>
-              <a:t>Expect all tests to pass; read failures and warnings. For </a:t>
+              <a:t>Expect all tests to pass; read failures and warnings. On </a:t>
             </a:r>
             <a:br/>
             <a:r>
@@ -6866,7 +6866,7 @@
                 </a:solidFill>
                 <a:latin typeface="Arial"/>
               </a:rPr>
-              <a:t>PowerShell equivalents, see </a:t>
+              <a:t>Windows, run in the WSL Ubuntu terminal: </a:t>
             </a:r>
             <a:r>
               <a:rPr sz="2100" b="0" i="0">
@@ -6876,7 +6876,7 @@
                 <a:latin typeface="Arial"/>
                 <a:hlinkClick r:id="rId2"/>
               </a:rPr>
-              <a:t>setup</a:t>
+              <a:t>Session 0</a:t>
             </a:r>
             <a:r>
               <a:rPr sz="2100" b="0" i="0">

--- a/materials/slides/session-1.pptx
+++ b/materials/slides/session-1.pptx
@@ -16154,7 +16154,25 @@
                 </a:solidFill>
                 <a:latin typeface="Arial"/>
               </a:rPr>
-              <a:t>curious: </a:t>
+              <a:t>curious: the </a:t>
+            </a:r>
+            <a:r>
+              <a:rPr sz="2100" b="0" i="0">
+                <a:solidFill>
+                  <a:srgbClr val="20344A"/>
+                </a:solidFill>
+                <a:latin typeface="Courier New"/>
+              </a:rPr>
+              <a:t>device-example</a:t>
+            </a:r>
+            <a:r>
+              <a:rPr sz="2100" b="0" i="0">
+                <a:solidFill>
+                  <a:srgbClr val="20344A"/>
+                </a:solidFill>
+                <a:latin typeface="Arial"/>
+              </a:rPr>
+              <a:t> folder of the </a:t>
             </a:r>
             <a:r>
               <a:rPr sz="2100" b="0" i="0">
@@ -16164,7 +16182,7 @@
                 <a:latin typeface="Arial"/>
                 <a:hlinkClick r:id="rId2"/>
               </a:rPr>
-              <a:t>3R-device-example</a:t>
+              <a:t>Sandbox</a:t>
             </a:r>
             <a:r>
               <a:rPr sz="2100" b="0" i="0">
